--- a/public/AITHON_2.0_Presentation.pptx
+++ b/public/AITHON_2.0_Presentation.pptx
@@ -1402,13 +1402,13 @@
       </p:sp>
       <p:sp>
         <p:nvSpPr>
-          <p:cNvPr id="30" name="Text 28"/>
+          <p:cNvPr id="32" name="Text 30"/>
           <p:cNvSpPr txBox="1"/>
           <p:nvPr/>
         </p:nvSpPr>
         <p:spPr>
           <a:xfrm>
-            <a:off x="713232" y="2883877"/>
+            <a:off x="713232" y="3337560"/>
             <a:ext cx="5120640" cy="365760"/>
           </a:xfrm>
           <a:prstGeom prst="rect">
@@ -1436,109 +1436,7 @@
                 <a:ea typeface="Calibri" pitchFamily="34" charset="-122"/>
                 <a:cs typeface="Times New Roman" panose="02020603050405020304" pitchFamily="18" charset="0"/>
               </a:rPr>
-              <a:t>Theme  —</a:t>
-            </a:r>
-            <a:endParaRPr lang="en-US" sz="1450" dirty="0">
-              <a:solidFill>
-                <a:schemeClr val="tx1">
-                  <a:lumMod val="95000"/>
-                  <a:lumOff val="5000"/>
-                </a:schemeClr>
-              </a:solidFill>
-              <a:latin typeface="Times New Roman" panose="02020603050405020304" pitchFamily="18" charset="0"/>
-              <a:cs typeface="Times New Roman" panose="02020603050405020304" pitchFamily="18" charset="0"/>
-            </a:endParaRPr>
-          </a:p>
-        </p:txBody>
-      </p:sp>
-      <p:sp>
-        <p:nvSpPr>
-          <p:cNvPr id="32" name="Text 30"/>
-          <p:cNvSpPr txBox="1"/>
-          <p:nvPr/>
-        </p:nvSpPr>
-        <p:spPr>
-          <a:xfrm>
-            <a:off x="713232" y="3337560"/>
-            <a:ext cx="5120640" cy="365760"/>
-          </a:xfrm>
-          <a:prstGeom prst="rect">
-            <a:avLst/>
-          </a:prstGeom>
-          <a:noFill/>
-          <a:ln/>
-        </p:spPr>
-        <p:txBody>
-          <a:bodyPr wrap="square" lIns="0" tIns="0" rIns="0" bIns="0" rtlCol="0" anchor="ctr"/>
-          <a:lstStyle/>
-          <a:p>
-            <a:pPr marL="0" indent="0" algn="l">
-              <a:buNone/>
-            </a:pPr>
-            <a:r>
-              <a:rPr lang="en-US" sz="1450" dirty="0">
-                <a:solidFill>
-                  <a:schemeClr val="tx1">
-                    <a:lumMod val="95000"/>
-                    <a:lumOff val="5000"/>
-                  </a:schemeClr>
-                </a:solidFill>
-                <a:latin typeface="Times New Roman" panose="02020603050405020304" pitchFamily="18" charset="0"/>
-                <a:ea typeface="Calibri" pitchFamily="34" charset="-122"/>
-                <a:cs typeface="Times New Roman" panose="02020603050405020304" pitchFamily="18" charset="0"/>
-              </a:rPr>
               <a:t>PS Category  —  Software / Hardware</a:t>
-            </a:r>
-            <a:endParaRPr lang="en-US" sz="1450" dirty="0">
-              <a:solidFill>
-                <a:schemeClr val="tx1">
-                  <a:lumMod val="95000"/>
-                  <a:lumOff val="5000"/>
-                </a:schemeClr>
-              </a:solidFill>
-              <a:latin typeface="Times New Roman" panose="02020603050405020304" pitchFamily="18" charset="0"/>
-              <a:cs typeface="Times New Roman" panose="02020603050405020304" pitchFamily="18" charset="0"/>
-            </a:endParaRPr>
-          </a:p>
-        </p:txBody>
-      </p:sp>
-      <p:sp>
-        <p:nvSpPr>
-          <p:cNvPr id="34" name="Text 32"/>
-          <p:cNvSpPr txBox="1"/>
-          <p:nvPr/>
-        </p:nvSpPr>
-        <p:spPr>
-          <a:xfrm>
-            <a:off x="713232" y="3794760"/>
-            <a:ext cx="5120640" cy="365760"/>
-          </a:xfrm>
-          <a:prstGeom prst="rect">
-            <a:avLst/>
-          </a:prstGeom>
-          <a:noFill/>
-          <a:ln/>
-        </p:spPr>
-        <p:txBody>
-          <a:bodyPr wrap="square" lIns="0" tIns="0" rIns="0" bIns="0" rtlCol="0" anchor="ctr"/>
-          <a:lstStyle/>
-          <a:p>
-            <a:pPr marL="0" indent="0" algn="l">
-              <a:buNone/>
-            </a:pPr>
-            <a:r>
-              <a:rPr lang="en-US" sz="1450" dirty="0">
-                <a:solidFill>
-                  <a:schemeClr val="tx1">
-                    <a:lumMod val="95000"/>
-                    <a:lumOff val="5000"/>
-                  </a:schemeClr>
-                </a:solidFill>
-                <a:latin typeface="Times New Roman" panose="02020603050405020304" pitchFamily="18" charset="0"/>
-                <a:ea typeface="Calibri" pitchFamily="34" charset="-122"/>
-                <a:cs typeface="Times New Roman" panose="02020603050405020304" pitchFamily="18" charset="0"/>
-              </a:rPr>
-              <a:t>Team ID  —</a:t>
             </a:r>
             <a:endParaRPr lang="en-US" sz="1450" dirty="0">
               <a:solidFill>
@@ -3059,6 +2957,13 @@
           </a:solidFill>
           <a:ln/>
         </p:spPr>
+        <p:txBody>
+          <a:bodyPr/>
+          <a:lstStyle/>
+          <a:p>
+            <a:endParaRPr lang="en-US"/>
+          </a:p>
+        </p:txBody>
       </p:sp>
       <p:sp>
         <p:nvSpPr>
@@ -3901,6 +3806,13 @@
             <a:prstDash val="solid"/>
           </a:ln>
         </p:spPr>
+        <p:txBody>
+          <a:bodyPr/>
+          <a:lstStyle/>
+          <a:p>
+            <a:endParaRPr lang="en-US"/>
+          </a:p>
+        </p:txBody>
       </p:sp>
       <p:sp>
         <p:nvSpPr>
@@ -4028,6 +3940,13 @@
             <a:prstDash val="solid"/>
           </a:ln>
         </p:spPr>
+        <p:txBody>
+          <a:bodyPr/>
+          <a:lstStyle/>
+          <a:p>
+            <a:endParaRPr lang="en-US"/>
+          </a:p>
+        </p:txBody>
       </p:sp>
       <p:sp>
         <p:nvSpPr>
@@ -4155,6 +4074,13 @@
             <a:prstDash val="solid"/>
           </a:ln>
         </p:spPr>
+        <p:txBody>
+          <a:bodyPr/>
+          <a:lstStyle/>
+          <a:p>
+            <a:endParaRPr lang="en-US"/>
+          </a:p>
+        </p:txBody>
       </p:sp>
       <p:sp>
         <p:nvSpPr>
@@ -4282,6 +4208,13 @@
             <a:prstDash val="solid"/>
           </a:ln>
         </p:spPr>
+        <p:txBody>
+          <a:bodyPr/>
+          <a:lstStyle/>
+          <a:p>
+            <a:endParaRPr lang="en-US"/>
+          </a:p>
+        </p:txBody>
       </p:sp>
       <p:sp>
         <p:nvSpPr>
@@ -4409,6 +4342,13 @@
             <a:prstDash val="solid"/>
           </a:ln>
         </p:spPr>
+        <p:txBody>
+          <a:bodyPr/>
+          <a:lstStyle/>
+          <a:p>
+            <a:endParaRPr lang="en-US"/>
+          </a:p>
+        </p:txBody>
       </p:sp>
       <p:sp>
         <p:nvSpPr>
@@ -4584,6 +4524,13 @@
           </a:solidFill>
           <a:ln/>
         </p:spPr>
+        <p:txBody>
+          <a:bodyPr/>
+          <a:lstStyle/>
+          <a:p>
+            <a:endParaRPr lang="en-US"/>
+          </a:p>
+        </p:txBody>
       </p:sp>
       <p:sp>
         <p:nvSpPr>
@@ -4649,6 +4596,13 @@
           </a:solidFill>
           <a:ln/>
         </p:spPr>
+        <p:txBody>
+          <a:bodyPr/>
+          <a:lstStyle/>
+          <a:p>
+            <a:endParaRPr lang="en-US"/>
+          </a:p>
+        </p:txBody>
       </p:sp>
       <p:sp>
         <p:nvSpPr>
@@ -4671,6 +4625,13 @@
           </a:solidFill>
           <a:ln/>
         </p:spPr>
+        <p:txBody>
+          <a:bodyPr/>
+          <a:lstStyle/>
+          <a:p>
+            <a:endParaRPr lang="en-US"/>
+          </a:p>
+        </p:txBody>
       </p:sp>
       <p:sp>
         <p:nvSpPr>
@@ -4736,6 +4697,13 @@
           </a:solidFill>
           <a:ln/>
         </p:spPr>
+        <p:txBody>
+          <a:bodyPr/>
+          <a:lstStyle/>
+          <a:p>
+            <a:endParaRPr lang="en-US"/>
+          </a:p>
+        </p:txBody>
       </p:sp>
       <p:sp>
         <p:nvSpPr>
@@ -4758,6 +4726,13 @@
           </a:solidFill>
           <a:ln/>
         </p:spPr>
+        <p:txBody>
+          <a:bodyPr/>
+          <a:lstStyle/>
+          <a:p>
+            <a:endParaRPr lang="en-US"/>
+          </a:p>
+        </p:txBody>
       </p:sp>
       <p:sp>
         <p:nvSpPr>
@@ -4846,6 +4821,13 @@
           </a:solidFill>
           <a:ln/>
         </p:spPr>
+        <p:txBody>
+          <a:bodyPr/>
+          <a:lstStyle/>
+          <a:p>
+            <a:endParaRPr lang="en-US"/>
+          </a:p>
+        </p:txBody>
       </p:sp>
       <p:sp>
         <p:nvSpPr>
@@ -4868,6 +4850,13 @@
           </a:solidFill>
           <a:ln/>
         </p:spPr>
+        <p:txBody>
+          <a:bodyPr/>
+          <a:lstStyle/>
+          <a:p>
+            <a:endParaRPr lang="en-US"/>
+          </a:p>
+        </p:txBody>
       </p:sp>
       <p:sp>
         <p:nvSpPr>
